--- a/test/ImplementationGuideImages.pptx
+++ b/test/ImplementationGuideImages.pptx
@@ -4,19 +4,16 @@
   <p:sldMasterIdLst>
     <p:sldMasterId id="2147483648" r:id="rId1"/>
   </p:sldMasterIdLst>
-  <p:notesMasterIdLst>
-    <p:notesMasterId r:id="rId11"/>
-  </p:notesMasterIdLst>
   <p:sldIdLst>
     <p:sldId id="259" r:id="rId2"/>
     <p:sldId id="256" r:id="rId3"/>
     <p:sldId id="257" r:id="rId4"/>
     <p:sldId id="261" r:id="rId5"/>
-    <p:sldId id="267" r:id="rId6"/>
+    <p:sldId id="258" r:id="rId6"/>
     <p:sldId id="262" r:id="rId7"/>
     <p:sldId id="266" r:id="rId8"/>
     <p:sldId id="264" r:id="rId9"/>
-    <p:sldId id="265" r:id="rId10"/>
+    <p:sldId id="267" r:id="rId10"/>
   </p:sldIdLst>
   <p:sldSz cx="12192000" cy="6858000"/>
   <p:notesSz cx="6858000" cy="9144000"/>
@@ -123,440 +120,6 @@
 </p:presentation>
 </file>
 
-<file path=ppt/notesMasters/notesMaster1.xml><?xml version="1.0" encoding="utf-8"?>
-<p:notesMaster xmlns:a="http://schemas.openxmlformats.org/drawingml/2006/main" xmlns:r="http://schemas.openxmlformats.org/officeDocument/2006/relationships" xmlns:p="http://schemas.openxmlformats.org/presentationml/2006/main">
-  <p:cSld>
-    <p:bg>
-      <p:bgRef idx="1001">
-        <a:schemeClr val="bg1"/>
-      </p:bgRef>
-    </p:bg>
-    <p:spTree>
-      <p:nvGrpSpPr>
-        <p:cNvPr id="1" name=""/>
-        <p:cNvGrpSpPr/>
-        <p:nvPr/>
-      </p:nvGrpSpPr>
-      <p:grpSpPr>
-        <a:xfrm>
-          <a:off x="0" y="0"/>
-          <a:ext cx="0" cy="0"/>
-          <a:chOff x="0" y="0"/>
-          <a:chExt cx="0" cy="0"/>
-        </a:xfrm>
-      </p:grpSpPr>
-      <p:sp>
-        <p:nvSpPr>
-          <p:cNvPr id="2" name="Header Placeholder 1"/>
-          <p:cNvSpPr>
-            <a:spLocks noGrp="1"/>
-          </p:cNvSpPr>
-          <p:nvPr>
-            <p:ph type="hdr" sz="quarter"/>
-          </p:nvPr>
-        </p:nvSpPr>
-        <p:spPr>
-          <a:xfrm>
-            <a:off x="0" y="0"/>
-            <a:ext cx="2971800" cy="458788"/>
-          </a:xfrm>
-          <a:prstGeom prst="rect">
-            <a:avLst/>
-          </a:prstGeom>
-        </p:spPr>
-        <p:txBody>
-          <a:bodyPr vert="horz" lIns="91440" tIns="45720" rIns="91440" bIns="45720" rtlCol="0"/>
-          <a:lstStyle>
-            <a:lvl1pPr algn="l">
-              <a:defRPr sz="1200"/>
-            </a:lvl1pPr>
-          </a:lstStyle>
-          <a:p>
-            <a:endParaRPr lang="en-SE"/>
-          </a:p>
-        </p:txBody>
-      </p:sp>
-      <p:sp>
-        <p:nvSpPr>
-          <p:cNvPr id="3" name="Date Placeholder 2"/>
-          <p:cNvSpPr>
-            <a:spLocks noGrp="1"/>
-          </p:cNvSpPr>
-          <p:nvPr>
-            <p:ph type="dt" idx="1"/>
-          </p:nvPr>
-        </p:nvSpPr>
-        <p:spPr>
-          <a:xfrm>
-            <a:off x="3884613" y="0"/>
-            <a:ext cx="2971800" cy="458788"/>
-          </a:xfrm>
-          <a:prstGeom prst="rect">
-            <a:avLst/>
-          </a:prstGeom>
-        </p:spPr>
-        <p:txBody>
-          <a:bodyPr vert="horz" lIns="91440" tIns="45720" rIns="91440" bIns="45720" rtlCol="0"/>
-          <a:lstStyle>
-            <a:lvl1pPr algn="r">
-              <a:defRPr sz="1200"/>
-            </a:lvl1pPr>
-          </a:lstStyle>
-          <a:p>
-            <a:fld id="{F5FCFA62-9BA5-4CFC-B9F8-0742522C8520}" type="datetimeFigureOut">
-              <a:rPr lang="en-SE" smtClean="0"/>
-              <a:t>2026-02-25</a:t>
-            </a:fld>
-            <a:endParaRPr lang="en-SE"/>
-          </a:p>
-        </p:txBody>
-      </p:sp>
-      <p:sp>
-        <p:nvSpPr>
-          <p:cNvPr id="4" name="Slide Image Placeholder 3"/>
-          <p:cNvSpPr>
-            <a:spLocks noGrp="1" noRot="1" noChangeAspect="1"/>
-          </p:cNvSpPr>
-          <p:nvPr>
-            <p:ph type="sldImg" idx="2"/>
-          </p:nvPr>
-        </p:nvSpPr>
-        <p:spPr>
-          <a:xfrm>
-            <a:off x="685800" y="1143000"/>
-            <a:ext cx="5486400" cy="3086100"/>
-          </a:xfrm>
-          <a:prstGeom prst="rect">
-            <a:avLst/>
-          </a:prstGeom>
-          <a:noFill/>
-          <a:ln w="12700">
-            <a:solidFill>
-              <a:prstClr val="black"/>
-            </a:solidFill>
-          </a:ln>
-        </p:spPr>
-        <p:txBody>
-          <a:bodyPr vert="horz" lIns="91440" tIns="45720" rIns="91440" bIns="45720" rtlCol="0" anchor="ctr"/>
-          <a:lstStyle/>
-          <a:p>
-            <a:endParaRPr lang="en-SE"/>
-          </a:p>
-        </p:txBody>
-      </p:sp>
-      <p:sp>
-        <p:nvSpPr>
-          <p:cNvPr id="5" name="Notes Placeholder 4"/>
-          <p:cNvSpPr>
-            <a:spLocks noGrp="1"/>
-          </p:cNvSpPr>
-          <p:nvPr>
-            <p:ph type="body" sz="quarter" idx="3"/>
-          </p:nvPr>
-        </p:nvSpPr>
-        <p:spPr>
-          <a:xfrm>
-            <a:off x="685800" y="4400550"/>
-            <a:ext cx="5486400" cy="3600450"/>
-          </a:xfrm>
-          <a:prstGeom prst="rect">
-            <a:avLst/>
-          </a:prstGeom>
-        </p:spPr>
-        <p:txBody>
-          <a:bodyPr vert="horz" lIns="91440" tIns="45720" rIns="91440" bIns="45720" rtlCol="0"/>
-          <a:lstStyle/>
-          <a:p>
-            <a:pPr lvl="0"/>
-            <a:r>
-              <a:rPr lang="en-US"/>
-              <a:t>Click to edit Master text styles</a:t>
-            </a:r>
-          </a:p>
-          <a:p>
-            <a:pPr lvl="1"/>
-            <a:r>
-              <a:rPr lang="en-US"/>
-              <a:t>Second level</a:t>
-            </a:r>
-          </a:p>
-          <a:p>
-            <a:pPr lvl="2"/>
-            <a:r>
-              <a:rPr lang="en-US"/>
-              <a:t>Third level</a:t>
-            </a:r>
-          </a:p>
-          <a:p>
-            <a:pPr lvl="3"/>
-            <a:r>
-              <a:rPr lang="en-US"/>
-              <a:t>Fourth level</a:t>
-            </a:r>
-          </a:p>
-          <a:p>
-            <a:pPr lvl="4"/>
-            <a:r>
-              <a:rPr lang="en-US"/>
-              <a:t>Fifth level</a:t>
-            </a:r>
-            <a:endParaRPr lang="en-SE"/>
-          </a:p>
-        </p:txBody>
-      </p:sp>
-      <p:sp>
-        <p:nvSpPr>
-          <p:cNvPr id="6" name="Footer Placeholder 5"/>
-          <p:cNvSpPr>
-            <a:spLocks noGrp="1"/>
-          </p:cNvSpPr>
-          <p:nvPr>
-            <p:ph type="ftr" sz="quarter" idx="4"/>
-          </p:nvPr>
-        </p:nvSpPr>
-        <p:spPr>
-          <a:xfrm>
-            <a:off x="0" y="8685213"/>
-            <a:ext cx="2971800" cy="458787"/>
-          </a:xfrm>
-          <a:prstGeom prst="rect">
-            <a:avLst/>
-          </a:prstGeom>
-        </p:spPr>
-        <p:txBody>
-          <a:bodyPr vert="horz" lIns="91440" tIns="45720" rIns="91440" bIns="45720" rtlCol="0" anchor="b"/>
-          <a:lstStyle>
-            <a:lvl1pPr algn="l">
-              <a:defRPr sz="1200"/>
-            </a:lvl1pPr>
-          </a:lstStyle>
-          <a:p>
-            <a:endParaRPr lang="en-SE"/>
-          </a:p>
-        </p:txBody>
-      </p:sp>
-      <p:sp>
-        <p:nvSpPr>
-          <p:cNvPr id="7" name="Slide Number Placeholder 6"/>
-          <p:cNvSpPr>
-            <a:spLocks noGrp="1"/>
-          </p:cNvSpPr>
-          <p:nvPr>
-            <p:ph type="sldNum" sz="quarter" idx="5"/>
-          </p:nvPr>
-        </p:nvSpPr>
-        <p:spPr>
-          <a:xfrm>
-            <a:off x="3884613" y="8685213"/>
-            <a:ext cx="2971800" cy="458787"/>
-          </a:xfrm>
-          <a:prstGeom prst="rect">
-            <a:avLst/>
-          </a:prstGeom>
-        </p:spPr>
-        <p:txBody>
-          <a:bodyPr vert="horz" lIns="91440" tIns="45720" rIns="91440" bIns="45720" rtlCol="0" anchor="b"/>
-          <a:lstStyle>
-            <a:lvl1pPr algn="r">
-              <a:defRPr sz="1200"/>
-            </a:lvl1pPr>
-          </a:lstStyle>
-          <a:p>
-            <a:fld id="{C080DDFB-FAB3-456A-8560-E4281018BEC6}" type="slidenum">
-              <a:rPr lang="en-SE" smtClean="0"/>
-              <a:t>‹#›</a:t>
-            </a:fld>
-            <a:endParaRPr lang="en-SE"/>
-          </a:p>
-        </p:txBody>
-      </p:sp>
-    </p:spTree>
-    <p:extLst>
-      <p:ext uri="{BB962C8B-B14F-4D97-AF65-F5344CB8AC3E}">
-        <p14:creationId xmlns:p14="http://schemas.microsoft.com/office/powerpoint/2010/main" val="2806376740"/>
-      </p:ext>
-    </p:extLst>
-  </p:cSld>
-  <p:clrMap bg1="lt1" tx1="dk1" bg2="lt2" tx2="dk2" accent1="accent1" accent2="accent2" accent3="accent3" accent4="accent4" accent5="accent5" accent6="accent6" hlink="hlink" folHlink="folHlink"/>
-  <p:notesStyle>
-    <a:lvl1pPr marL="0" algn="l" defTabSz="914400" rtl="0" eaLnBrk="1" latinLnBrk="0" hangingPunct="1">
-      <a:defRPr sz="1200" kern="1200">
-        <a:solidFill>
-          <a:schemeClr val="tx1"/>
-        </a:solidFill>
-        <a:latin typeface="+mn-lt"/>
-        <a:ea typeface="+mn-ea"/>
-        <a:cs typeface="+mn-cs"/>
-      </a:defRPr>
-    </a:lvl1pPr>
-    <a:lvl2pPr marL="457200" algn="l" defTabSz="914400" rtl="0" eaLnBrk="1" latinLnBrk="0" hangingPunct="1">
-      <a:defRPr sz="1200" kern="1200">
-        <a:solidFill>
-          <a:schemeClr val="tx1"/>
-        </a:solidFill>
-        <a:latin typeface="+mn-lt"/>
-        <a:ea typeface="+mn-ea"/>
-        <a:cs typeface="+mn-cs"/>
-      </a:defRPr>
-    </a:lvl2pPr>
-    <a:lvl3pPr marL="914400" algn="l" defTabSz="914400" rtl="0" eaLnBrk="1" latinLnBrk="0" hangingPunct="1">
-      <a:defRPr sz="1200" kern="1200">
-        <a:solidFill>
-          <a:schemeClr val="tx1"/>
-        </a:solidFill>
-        <a:latin typeface="+mn-lt"/>
-        <a:ea typeface="+mn-ea"/>
-        <a:cs typeface="+mn-cs"/>
-      </a:defRPr>
-    </a:lvl3pPr>
-    <a:lvl4pPr marL="1371600" algn="l" defTabSz="914400" rtl="0" eaLnBrk="1" latinLnBrk="0" hangingPunct="1">
-      <a:defRPr sz="1200" kern="1200">
-        <a:solidFill>
-          <a:schemeClr val="tx1"/>
-        </a:solidFill>
-        <a:latin typeface="+mn-lt"/>
-        <a:ea typeface="+mn-ea"/>
-        <a:cs typeface="+mn-cs"/>
-      </a:defRPr>
-    </a:lvl4pPr>
-    <a:lvl5pPr marL="1828800" algn="l" defTabSz="914400" rtl="0" eaLnBrk="1" latinLnBrk="0" hangingPunct="1">
-      <a:defRPr sz="1200" kern="1200">
-        <a:solidFill>
-          <a:schemeClr val="tx1"/>
-        </a:solidFill>
-        <a:latin typeface="+mn-lt"/>
-        <a:ea typeface="+mn-ea"/>
-        <a:cs typeface="+mn-cs"/>
-      </a:defRPr>
-    </a:lvl5pPr>
-    <a:lvl6pPr marL="2286000" algn="l" defTabSz="914400" rtl="0" eaLnBrk="1" latinLnBrk="0" hangingPunct="1">
-      <a:defRPr sz="1200" kern="1200">
-        <a:solidFill>
-          <a:schemeClr val="tx1"/>
-        </a:solidFill>
-        <a:latin typeface="+mn-lt"/>
-        <a:ea typeface="+mn-ea"/>
-        <a:cs typeface="+mn-cs"/>
-      </a:defRPr>
-    </a:lvl6pPr>
-    <a:lvl7pPr marL="2743200" algn="l" defTabSz="914400" rtl="0" eaLnBrk="1" latinLnBrk="0" hangingPunct="1">
-      <a:defRPr sz="1200" kern="1200">
-        <a:solidFill>
-          <a:schemeClr val="tx1"/>
-        </a:solidFill>
-        <a:latin typeface="+mn-lt"/>
-        <a:ea typeface="+mn-ea"/>
-        <a:cs typeface="+mn-cs"/>
-      </a:defRPr>
-    </a:lvl7pPr>
-    <a:lvl8pPr marL="3200400" algn="l" defTabSz="914400" rtl="0" eaLnBrk="1" latinLnBrk="0" hangingPunct="1">
-      <a:defRPr sz="1200" kern="1200">
-        <a:solidFill>
-          <a:schemeClr val="tx1"/>
-        </a:solidFill>
-        <a:latin typeface="+mn-lt"/>
-        <a:ea typeface="+mn-ea"/>
-        <a:cs typeface="+mn-cs"/>
-      </a:defRPr>
-    </a:lvl8pPr>
-    <a:lvl9pPr marL="3657600" algn="l" defTabSz="914400" rtl="0" eaLnBrk="1" latinLnBrk="0" hangingPunct="1">
-      <a:defRPr sz="1200" kern="1200">
-        <a:solidFill>
-          <a:schemeClr val="tx1"/>
-        </a:solidFill>
-        <a:latin typeface="+mn-lt"/>
-        <a:ea typeface="+mn-ea"/>
-        <a:cs typeface="+mn-cs"/>
-      </a:defRPr>
-    </a:lvl9pPr>
-  </p:notesStyle>
-</p:notesMaster>
-</file>
-
-<file path=ppt/notesSlides/notesSlide1.xml><?xml version="1.0" encoding="utf-8"?>
-<p:notes xmlns:a="http://schemas.openxmlformats.org/drawingml/2006/main" xmlns:r="http://schemas.openxmlformats.org/officeDocument/2006/relationships" xmlns:p="http://schemas.openxmlformats.org/presentationml/2006/main">
-  <p:cSld>
-    <p:spTree>
-      <p:nvGrpSpPr>
-        <p:cNvPr id="1" name=""/>
-        <p:cNvGrpSpPr/>
-        <p:nvPr/>
-      </p:nvGrpSpPr>
-      <p:grpSpPr>
-        <a:xfrm>
-          <a:off x="0" y="0"/>
-          <a:ext cx="0" cy="0"/>
-          <a:chOff x="0" y="0"/>
-          <a:chExt cx="0" cy="0"/>
-        </a:xfrm>
-      </p:grpSpPr>
-      <p:sp>
-        <p:nvSpPr>
-          <p:cNvPr id="2" name="Slide Image Placeholder 1"/>
-          <p:cNvSpPr>
-            <a:spLocks noGrp="1" noRot="1" noChangeAspect="1"/>
-          </p:cNvSpPr>
-          <p:nvPr>
-            <p:ph type="sldImg"/>
-          </p:nvPr>
-        </p:nvSpPr>
-        <p:spPr/>
-      </p:sp>
-      <p:sp>
-        <p:nvSpPr>
-          <p:cNvPr id="3" name="Notes Placeholder 2"/>
-          <p:cNvSpPr>
-            <a:spLocks noGrp="1"/>
-          </p:cNvSpPr>
-          <p:nvPr>
-            <p:ph type="body" idx="1"/>
-          </p:nvPr>
-        </p:nvSpPr>
-        <p:spPr/>
-        <p:txBody>
-          <a:bodyPr/>
-          <a:lstStyle/>
-          <a:p>
-            <a:endParaRPr lang="en-SE"/>
-          </a:p>
-        </p:txBody>
-      </p:sp>
-      <p:sp>
-        <p:nvSpPr>
-          <p:cNvPr id="4" name="Slide Number Placeholder 3"/>
-          <p:cNvSpPr>
-            <a:spLocks noGrp="1"/>
-          </p:cNvSpPr>
-          <p:nvPr>
-            <p:ph type="sldNum" sz="quarter" idx="5"/>
-          </p:nvPr>
-        </p:nvSpPr>
-        <p:spPr/>
-        <p:txBody>
-          <a:bodyPr/>
-          <a:lstStyle/>
-          <a:p>
-            <a:fld id="{EDE76F83-ABAB-47D9-A4BE-08A4541193D4}" type="slidenum">
-              <a:rPr lang="en-SE" smtClean="0"/>
-              <a:t>5</a:t>
-            </a:fld>
-            <a:endParaRPr lang="en-SE"/>
-          </a:p>
-        </p:txBody>
-      </p:sp>
-    </p:spTree>
-    <p:extLst>
-      <p:ext uri="{BB962C8B-B14F-4D97-AF65-F5344CB8AC3E}">
-        <p14:creationId xmlns:p14="http://schemas.microsoft.com/office/powerpoint/2010/main" val="2180620900"/>
-      </p:ext>
-    </p:extLst>
-  </p:cSld>
-  <p:clrMapOvr>
-    <a:masterClrMapping/>
-  </p:clrMapOvr>
-</p:notes>
-</file>
-
 <file path=ppt/slideLayouts/slideLayout1.xml><?xml version="1.0" encoding="utf-8"?>
 <p:sldLayout xmlns:a="http://schemas.openxmlformats.org/drawingml/2006/main" xmlns:r="http://schemas.openxmlformats.org/officeDocument/2006/relationships" xmlns:p="http://schemas.openxmlformats.org/presentationml/2006/main" type="title" preserve="1">
   <p:cSld name="Title Slide">
@@ -706,7 +269,7 @@
           <a:p>
             <a:fld id="{6B5A8AD0-4133-444B-956D-B3352209FA33}" type="datetimeFigureOut">
               <a:rPr lang="en-SE" smtClean="0"/>
-              <a:t>2026-02-25</a:t>
+              <a:t>2026-03-05</a:t>
             </a:fld>
             <a:endParaRPr lang="en-SE"/>
           </a:p>
@@ -906,7 +469,7 @@
           <a:p>
             <a:fld id="{6B5A8AD0-4133-444B-956D-B3352209FA33}" type="datetimeFigureOut">
               <a:rPr lang="en-SE" smtClean="0"/>
-              <a:t>2026-02-25</a:t>
+              <a:t>2026-03-05</a:t>
             </a:fld>
             <a:endParaRPr lang="en-SE"/>
           </a:p>
@@ -1116,7 +679,7 @@
           <a:p>
             <a:fld id="{6B5A8AD0-4133-444B-956D-B3352209FA33}" type="datetimeFigureOut">
               <a:rPr lang="en-SE" smtClean="0"/>
-              <a:t>2026-02-25</a:t>
+              <a:t>2026-03-05</a:t>
             </a:fld>
             <a:endParaRPr lang="en-SE"/>
           </a:p>
@@ -1316,7 +879,7 @@
           <a:p>
             <a:fld id="{6B5A8AD0-4133-444B-956D-B3352209FA33}" type="datetimeFigureOut">
               <a:rPr lang="en-SE" smtClean="0"/>
-              <a:t>2026-02-25</a:t>
+              <a:t>2026-03-05</a:t>
             </a:fld>
             <a:endParaRPr lang="en-SE"/>
           </a:p>
@@ -1592,7 +1155,7 @@
           <a:p>
             <a:fld id="{6B5A8AD0-4133-444B-956D-B3352209FA33}" type="datetimeFigureOut">
               <a:rPr lang="en-SE" smtClean="0"/>
-              <a:t>2026-02-25</a:t>
+              <a:t>2026-03-05</a:t>
             </a:fld>
             <a:endParaRPr lang="en-SE"/>
           </a:p>
@@ -1860,7 +1423,7 @@
           <a:p>
             <a:fld id="{6B5A8AD0-4133-444B-956D-B3352209FA33}" type="datetimeFigureOut">
               <a:rPr lang="en-SE" smtClean="0"/>
-              <a:t>2026-02-25</a:t>
+              <a:t>2026-03-05</a:t>
             </a:fld>
             <a:endParaRPr lang="en-SE"/>
           </a:p>
@@ -2275,7 +1838,7 @@
           <a:p>
             <a:fld id="{6B5A8AD0-4133-444B-956D-B3352209FA33}" type="datetimeFigureOut">
               <a:rPr lang="en-SE" smtClean="0"/>
-              <a:t>2026-02-25</a:t>
+              <a:t>2026-03-05</a:t>
             </a:fld>
             <a:endParaRPr lang="en-SE"/>
           </a:p>
@@ -2417,7 +1980,7 @@
           <a:p>
             <a:fld id="{6B5A8AD0-4133-444B-956D-B3352209FA33}" type="datetimeFigureOut">
               <a:rPr lang="en-SE" smtClean="0"/>
-              <a:t>2026-02-25</a:t>
+              <a:t>2026-03-05</a:t>
             </a:fld>
             <a:endParaRPr lang="en-SE"/>
           </a:p>
@@ -2530,7 +2093,7 @@
           <a:p>
             <a:fld id="{6B5A8AD0-4133-444B-956D-B3352209FA33}" type="datetimeFigureOut">
               <a:rPr lang="en-SE" smtClean="0"/>
-              <a:t>2026-02-25</a:t>
+              <a:t>2026-03-05</a:t>
             </a:fld>
             <a:endParaRPr lang="en-SE"/>
           </a:p>
@@ -2843,7 +2406,7 @@
           <a:p>
             <a:fld id="{6B5A8AD0-4133-444B-956D-B3352209FA33}" type="datetimeFigureOut">
               <a:rPr lang="en-SE" smtClean="0"/>
-              <a:t>2026-02-25</a:t>
+              <a:t>2026-03-05</a:t>
             </a:fld>
             <a:endParaRPr lang="en-SE"/>
           </a:p>
@@ -3132,7 +2695,7 @@
           <a:p>
             <a:fld id="{6B5A8AD0-4133-444B-956D-B3352209FA33}" type="datetimeFigureOut">
               <a:rPr lang="en-SE" smtClean="0"/>
-              <a:t>2026-02-25</a:t>
+              <a:t>2026-03-05</a:t>
             </a:fld>
             <a:endParaRPr lang="en-SE"/>
           </a:p>
@@ -3375,7 +2938,7 @@
           <a:p>
             <a:fld id="{6B5A8AD0-4133-444B-956D-B3352209FA33}" type="datetimeFigureOut">
               <a:rPr lang="en-SE" smtClean="0"/>
-              <a:t>2026-02-25</a:t>
+              <a:t>2026-03-05</a:t>
             </a:fld>
             <a:endParaRPr lang="en-SE"/>
           </a:p>
@@ -11327,7 +10890,7 @@
           <p:nvPr/>
         </p:nvPicPr>
         <p:blipFill>
-          <a:blip r:embed="rId3"/>
+          <a:blip r:embed="rId2"/>
           <a:stretch>
             <a:fillRect/>
           </a:stretch>
@@ -11344,10 +10907,10 @@
       </p:pic>
       <p:pic>
         <p:nvPicPr>
-          <p:cNvPr id="7" name="Picture 6">
-            <a:extLst>
-              <a:ext uri="{FF2B5EF4-FFF2-40B4-BE49-F238E27FC236}">
-                <a16:creationId xmlns:a16="http://schemas.microsoft.com/office/drawing/2014/main" id="{50817835-BB45-757F-9DCA-6D224F890C77}"/>
+          <p:cNvPr id="4" name="Picture 3">
+            <a:extLst>
+              <a:ext uri="{FF2B5EF4-FFF2-40B4-BE49-F238E27FC236}">
+                <a16:creationId xmlns:a16="http://schemas.microsoft.com/office/drawing/2014/main" id="{524984F8-040F-CFEE-ADB6-EE344F9A9AB8}"/>
               </a:ext>
             </a:extLst>
           </p:cNvPr>
@@ -11357,15 +10920,15 @@
           <p:nvPr/>
         </p:nvPicPr>
         <p:blipFill>
-          <a:blip r:embed="rId4"/>
+          <a:blip r:embed="rId3"/>
           <a:stretch>
             <a:fillRect/>
           </a:stretch>
         </p:blipFill>
         <p:spPr>
           <a:xfrm>
-            <a:off x="735769" y="1615651"/>
-            <a:ext cx="4238384" cy="4466605"/>
+            <a:off x="596393" y="1787855"/>
+            <a:ext cx="4207619" cy="3989786"/>
           </a:xfrm>
           <a:prstGeom prst="rect">
             <a:avLst/>
@@ -11375,7 +10938,7 @@
     </p:spTree>
     <p:extLst>
       <p:ext uri="{BB962C8B-B14F-4D97-AF65-F5344CB8AC3E}">
-        <p14:creationId xmlns:p14="http://schemas.microsoft.com/office/powerpoint/2010/main" val="830729293"/>
+        <p14:creationId xmlns:p14="http://schemas.microsoft.com/office/powerpoint/2010/main" val="2798728492"/>
       </p:ext>
     </p:extLst>
   </p:cSld>
@@ -14294,15 +13857,7 @@
             <a:pPr algn="ctr"/>
             <a:r>
               <a:rPr lang="en-US" sz="1000" dirty="0"/>
-              <a:t>id, name, MPID(s), code (</a:t>
-            </a:r>
-            <a:r>
-              <a:rPr lang="en-US" sz="1000" dirty="0" err="1"/>
-              <a:t>DrugCode</a:t>
-            </a:r>
-            <a:r>
-              <a:rPr lang="en-US" sz="1000" dirty="0"/>
-              <a:t>, …)</a:t>
+              <a:t>id, name</a:t>
             </a:r>
             <a:endParaRPr lang="en-SE" sz="1000" dirty="0"/>
           </a:p>
@@ -14359,7 +13914,7 @@
             <a:pPr algn="ctr"/>
             <a:r>
               <a:rPr lang="en-US" sz="1000" dirty="0"/>
-              <a:t>form parts</a:t>
+              <a:t>dose form attributes</a:t>
             </a:r>
           </a:p>
         </p:txBody>
@@ -14427,7 +13982,7 @@
             <a:pPr algn="ctr"/>
             <a:r>
               <a:rPr lang="en-US" sz="1000" dirty="0"/>
-              <a:t>code (UNII, </a:t>
+              <a:t>code(s) (UNII, </a:t>
             </a:r>
             <a:r>
               <a:rPr lang="en-US" sz="1000" dirty="0" err="1"/>
@@ -15105,6 +14660,7 @@
             </a:extLst>
           </p:cNvPr>
           <p:cNvCxnSpPr>
+            <a:cxnSpLocks/>
             <a:stCxn id="19" idx="2"/>
             <a:endCxn id="3" idx="0"/>
           </p:cNvCxnSpPr>
@@ -15844,1118 +15400,13 @@
     </p:spTree>
     <p:extLst>
       <p:ext uri="{BB962C8B-B14F-4D97-AF65-F5344CB8AC3E}">
-        <p14:creationId xmlns:p14="http://schemas.microsoft.com/office/powerpoint/2010/main" val="3938456585"/>
+        <p14:creationId xmlns:p14="http://schemas.microsoft.com/office/powerpoint/2010/main" val="3494527876"/>
       </p:ext>
     </p:extLst>
   </p:cSld>
   <p:clrMapOvr>
     <a:masterClrMapping/>
   </p:clrMapOvr>
-  <p:timing>
-    <p:tnLst>
-      <p:par>
-        <p:cTn id="1" dur="indefinite" restart="never" nodeType="tmRoot">
-          <p:childTnLst>
-            <p:seq concurrent="1" nextAc="seek">
-              <p:cTn id="2" dur="indefinite" nodeType="mainSeq">
-                <p:childTnLst>
-                  <p:par>
-                    <p:cTn id="3" fill="hold">
-                      <p:stCondLst>
-                        <p:cond delay="indefinite"/>
-                      </p:stCondLst>
-                      <p:childTnLst>
-                        <p:par>
-                          <p:cTn id="4" fill="hold">
-                            <p:stCondLst>
-                              <p:cond delay="0"/>
-                            </p:stCondLst>
-                            <p:childTnLst>
-                              <p:par>
-                                <p:cTn id="5" presetID="1" presetClass="entr" presetSubtype="0" fill="hold" grpId="0" nodeType="clickEffect">
-                                  <p:stCondLst>
-                                    <p:cond delay="0"/>
-                                  </p:stCondLst>
-                                  <p:childTnLst>
-                                    <p:set>
-                                      <p:cBhvr>
-                                        <p:cTn id="6" dur="1" fill="hold">
-                                          <p:stCondLst>
-                                            <p:cond delay="0"/>
-                                          </p:stCondLst>
-                                        </p:cTn>
-                                        <p:tgtEl>
-                                          <p:spTgt spid="3"/>
-                                        </p:tgtEl>
-                                        <p:attrNameLst>
-                                          <p:attrName>style.visibility</p:attrName>
-                                        </p:attrNameLst>
-                                      </p:cBhvr>
-                                      <p:to>
-                                        <p:strVal val="visible"/>
-                                      </p:to>
-                                    </p:set>
-                                  </p:childTnLst>
-                                </p:cTn>
-                              </p:par>
-                            </p:childTnLst>
-                          </p:cTn>
-                        </p:par>
-                      </p:childTnLst>
-                    </p:cTn>
-                  </p:par>
-                  <p:par>
-                    <p:cTn id="7" fill="hold">
-                      <p:stCondLst>
-                        <p:cond delay="indefinite"/>
-                      </p:stCondLst>
-                      <p:childTnLst>
-                        <p:par>
-                          <p:cTn id="8" fill="hold">
-                            <p:stCondLst>
-                              <p:cond delay="0"/>
-                            </p:stCondLst>
-                            <p:childTnLst>
-                              <p:par>
-                                <p:cTn id="9" presetID="1" presetClass="entr" presetSubtype="0" fill="hold" nodeType="clickEffect">
-                                  <p:stCondLst>
-                                    <p:cond delay="0"/>
-                                  </p:stCondLst>
-                                  <p:childTnLst>
-                                    <p:set>
-                                      <p:cBhvr>
-                                        <p:cTn id="10" dur="1" fill="hold">
-                                          <p:stCondLst>
-                                            <p:cond delay="0"/>
-                                          </p:stCondLst>
-                                        </p:cTn>
-                                        <p:tgtEl>
-                                          <p:spTgt spid="20"/>
-                                        </p:tgtEl>
-                                        <p:attrNameLst>
-                                          <p:attrName>style.visibility</p:attrName>
-                                        </p:attrNameLst>
-                                      </p:cBhvr>
-                                      <p:to>
-                                        <p:strVal val="visible"/>
-                                      </p:to>
-                                    </p:set>
-                                  </p:childTnLst>
-                                </p:cTn>
-                              </p:par>
-                              <p:par>
-                                <p:cTn id="11" presetID="1" presetClass="entr" presetSubtype="0" fill="hold" grpId="0" nodeType="withEffect">
-                                  <p:stCondLst>
-                                    <p:cond delay="0"/>
-                                  </p:stCondLst>
-                                  <p:childTnLst>
-                                    <p:set>
-                                      <p:cBhvr>
-                                        <p:cTn id="12" dur="1" fill="hold">
-                                          <p:stCondLst>
-                                            <p:cond delay="0"/>
-                                          </p:stCondLst>
-                                        </p:cTn>
-                                        <p:tgtEl>
-                                          <p:spTgt spid="19"/>
-                                        </p:tgtEl>
-                                        <p:attrNameLst>
-                                          <p:attrName>style.visibility</p:attrName>
-                                        </p:attrNameLst>
-                                      </p:cBhvr>
-                                      <p:to>
-                                        <p:strVal val="visible"/>
-                                      </p:to>
-                                    </p:set>
-                                  </p:childTnLst>
-                                </p:cTn>
-                              </p:par>
-                            </p:childTnLst>
-                          </p:cTn>
-                        </p:par>
-                      </p:childTnLst>
-                    </p:cTn>
-                  </p:par>
-                  <p:par>
-                    <p:cTn id="13" fill="hold">
-                      <p:stCondLst>
-                        <p:cond delay="indefinite"/>
-                      </p:stCondLst>
-                      <p:childTnLst>
-                        <p:par>
-                          <p:cTn id="14" fill="hold">
-                            <p:stCondLst>
-                              <p:cond delay="0"/>
-                            </p:stCondLst>
-                            <p:childTnLst>
-                              <p:par>
-                                <p:cTn id="15" presetID="1" presetClass="entr" presetSubtype="0" fill="hold" grpId="0" nodeType="clickEffect">
-                                  <p:stCondLst>
-                                    <p:cond delay="0"/>
-                                  </p:stCondLst>
-                                  <p:childTnLst>
-                                    <p:set>
-                                      <p:cBhvr>
-                                        <p:cTn id="16" dur="1" fill="hold">
-                                          <p:stCondLst>
-                                            <p:cond delay="0"/>
-                                          </p:stCondLst>
-                                        </p:cTn>
-                                        <p:tgtEl>
-                                          <p:spTgt spid="12"/>
-                                        </p:tgtEl>
-                                        <p:attrNameLst>
-                                          <p:attrName>style.visibility</p:attrName>
-                                        </p:attrNameLst>
-                                      </p:cBhvr>
-                                      <p:to>
-                                        <p:strVal val="visible"/>
-                                      </p:to>
-                                    </p:set>
-                                  </p:childTnLst>
-                                </p:cTn>
-                              </p:par>
-                              <p:par>
-                                <p:cTn id="17" presetID="1" presetClass="entr" presetSubtype="0" fill="hold" nodeType="withEffect">
-                                  <p:stCondLst>
-                                    <p:cond delay="0"/>
-                                  </p:stCondLst>
-                                  <p:childTnLst>
-                                    <p:set>
-                                      <p:cBhvr>
-                                        <p:cTn id="18" dur="1" fill="hold">
-                                          <p:stCondLst>
-                                            <p:cond delay="0"/>
-                                          </p:stCondLst>
-                                        </p:cTn>
-                                        <p:tgtEl>
-                                          <p:spTgt spid="11"/>
-                                        </p:tgtEl>
-                                        <p:attrNameLst>
-                                          <p:attrName>style.visibility</p:attrName>
-                                        </p:attrNameLst>
-                                      </p:cBhvr>
-                                      <p:to>
-                                        <p:strVal val="visible"/>
-                                      </p:to>
-                                    </p:set>
-                                  </p:childTnLst>
-                                </p:cTn>
-                              </p:par>
-                            </p:childTnLst>
-                          </p:cTn>
-                        </p:par>
-                      </p:childTnLst>
-                    </p:cTn>
-                  </p:par>
-                  <p:par>
-                    <p:cTn id="19" fill="hold">
-                      <p:stCondLst>
-                        <p:cond delay="indefinite"/>
-                      </p:stCondLst>
-                      <p:childTnLst>
-                        <p:par>
-                          <p:cTn id="20" fill="hold">
-                            <p:stCondLst>
-                              <p:cond delay="0"/>
-                            </p:stCondLst>
-                            <p:childTnLst>
-                              <p:par>
-                                <p:cTn id="21" presetID="1" presetClass="entr" presetSubtype="0" fill="hold" grpId="0" nodeType="clickEffect">
-                                  <p:stCondLst>
-                                    <p:cond delay="0"/>
-                                  </p:stCondLst>
-                                  <p:childTnLst>
-                                    <p:set>
-                                      <p:cBhvr>
-                                        <p:cTn id="22" dur="1" fill="hold">
-                                          <p:stCondLst>
-                                            <p:cond delay="0"/>
-                                          </p:stCondLst>
-                                        </p:cTn>
-                                        <p:tgtEl>
-                                          <p:spTgt spid="5"/>
-                                        </p:tgtEl>
-                                        <p:attrNameLst>
-                                          <p:attrName>style.visibility</p:attrName>
-                                        </p:attrNameLst>
-                                      </p:cBhvr>
-                                      <p:to>
-                                        <p:strVal val="visible"/>
-                                      </p:to>
-                                    </p:set>
-                                  </p:childTnLst>
-                                </p:cTn>
-                              </p:par>
-                              <p:par>
-                                <p:cTn id="23" presetID="1" presetClass="entr" presetSubtype="0" fill="hold" nodeType="withEffect">
-                                  <p:stCondLst>
-                                    <p:cond delay="0"/>
-                                  </p:stCondLst>
-                                  <p:childTnLst>
-                                    <p:set>
-                                      <p:cBhvr>
-                                        <p:cTn id="24" dur="1" fill="hold">
-                                          <p:stCondLst>
-                                            <p:cond delay="0"/>
-                                          </p:stCondLst>
-                                        </p:cTn>
-                                        <p:tgtEl>
-                                          <p:spTgt spid="7"/>
-                                        </p:tgtEl>
-                                        <p:attrNameLst>
-                                          <p:attrName>style.visibility</p:attrName>
-                                        </p:attrNameLst>
-                                      </p:cBhvr>
-                                      <p:to>
-                                        <p:strVal val="visible"/>
-                                      </p:to>
-                                    </p:set>
-                                  </p:childTnLst>
-                                </p:cTn>
-                              </p:par>
-                              <p:par>
-                                <p:cTn id="25" presetID="1" presetClass="entr" presetSubtype="0" fill="hold" grpId="0" nodeType="withEffect">
-                                  <p:stCondLst>
-                                    <p:cond delay="0"/>
-                                  </p:stCondLst>
-                                  <p:childTnLst>
-                                    <p:set>
-                                      <p:cBhvr>
-                                        <p:cTn id="26" dur="1" fill="hold">
-                                          <p:stCondLst>
-                                            <p:cond delay="0"/>
-                                          </p:stCondLst>
-                                        </p:cTn>
-                                        <p:tgtEl>
-                                          <p:spTgt spid="15"/>
-                                        </p:tgtEl>
-                                        <p:attrNameLst>
-                                          <p:attrName>style.visibility</p:attrName>
-                                        </p:attrNameLst>
-                                      </p:cBhvr>
-                                      <p:to>
-                                        <p:strVal val="visible"/>
-                                      </p:to>
-                                    </p:set>
-                                  </p:childTnLst>
-                                </p:cTn>
-                              </p:par>
-                            </p:childTnLst>
-                          </p:cTn>
-                        </p:par>
-                      </p:childTnLst>
-                    </p:cTn>
-                  </p:par>
-                  <p:par>
-                    <p:cTn id="27" fill="hold">
-                      <p:stCondLst>
-                        <p:cond delay="indefinite"/>
-                      </p:stCondLst>
-                      <p:childTnLst>
-                        <p:par>
-                          <p:cTn id="28" fill="hold">
-                            <p:stCondLst>
-                              <p:cond delay="0"/>
-                            </p:stCondLst>
-                            <p:childTnLst>
-                              <p:par>
-                                <p:cTn id="29" presetID="1" presetClass="entr" presetSubtype="0" fill="hold" nodeType="clickEffect">
-                                  <p:stCondLst>
-                                    <p:cond delay="0"/>
-                                  </p:stCondLst>
-                                  <p:childTnLst>
-                                    <p:set>
-                                      <p:cBhvr>
-                                        <p:cTn id="30" dur="1" fill="hold">
-                                          <p:stCondLst>
-                                            <p:cond delay="0"/>
-                                          </p:stCondLst>
-                                        </p:cTn>
-                                        <p:tgtEl>
-                                          <p:spTgt spid="17"/>
-                                        </p:tgtEl>
-                                        <p:attrNameLst>
-                                          <p:attrName>style.visibility</p:attrName>
-                                        </p:attrNameLst>
-                                      </p:cBhvr>
-                                      <p:to>
-                                        <p:strVal val="visible"/>
-                                      </p:to>
-                                    </p:set>
-                                  </p:childTnLst>
-                                </p:cTn>
-                              </p:par>
-                              <p:par>
-                                <p:cTn id="31" presetID="1" presetClass="entr" presetSubtype="0" fill="hold" grpId="0" nodeType="withEffect">
-                                  <p:stCondLst>
-                                    <p:cond delay="0"/>
-                                  </p:stCondLst>
-                                  <p:childTnLst>
-                                    <p:set>
-                                      <p:cBhvr>
-                                        <p:cTn id="32" dur="1" fill="hold">
-                                          <p:stCondLst>
-                                            <p:cond delay="0"/>
-                                          </p:stCondLst>
-                                        </p:cTn>
-                                        <p:tgtEl>
-                                          <p:spTgt spid="18"/>
-                                        </p:tgtEl>
-                                        <p:attrNameLst>
-                                          <p:attrName>style.visibility</p:attrName>
-                                        </p:attrNameLst>
-                                      </p:cBhvr>
-                                      <p:to>
-                                        <p:strVal val="visible"/>
-                                      </p:to>
-                                    </p:set>
-                                  </p:childTnLst>
-                                </p:cTn>
-                              </p:par>
-                            </p:childTnLst>
-                          </p:cTn>
-                        </p:par>
-                      </p:childTnLst>
-                    </p:cTn>
-                  </p:par>
-                  <p:par>
-                    <p:cTn id="33" fill="hold">
-                      <p:stCondLst>
-                        <p:cond delay="indefinite"/>
-                      </p:stCondLst>
-                      <p:childTnLst>
-                        <p:par>
-                          <p:cTn id="34" fill="hold">
-                            <p:stCondLst>
-                              <p:cond delay="0"/>
-                            </p:stCondLst>
-                            <p:childTnLst>
-                              <p:par>
-                                <p:cTn id="35" presetID="1" presetClass="entr" presetSubtype="0" fill="hold" nodeType="clickEffect">
-                                  <p:stCondLst>
-                                    <p:cond delay="0"/>
-                                  </p:stCondLst>
-                                  <p:childTnLst>
-                                    <p:set>
-                                      <p:cBhvr>
-                                        <p:cTn id="36" dur="1" fill="hold">
-                                          <p:stCondLst>
-                                            <p:cond delay="0"/>
-                                          </p:stCondLst>
-                                        </p:cTn>
-                                        <p:tgtEl>
-                                          <p:spTgt spid="8"/>
-                                        </p:tgtEl>
-                                        <p:attrNameLst>
-                                          <p:attrName>style.visibility</p:attrName>
-                                        </p:attrNameLst>
-                                      </p:cBhvr>
-                                      <p:to>
-                                        <p:strVal val="visible"/>
-                                      </p:to>
-                                    </p:set>
-                                  </p:childTnLst>
-                                </p:cTn>
-                              </p:par>
-                              <p:par>
-                                <p:cTn id="37" presetID="1" presetClass="entr" presetSubtype="0" fill="hold" grpId="0" nodeType="withEffect">
-                                  <p:stCondLst>
-                                    <p:cond delay="0"/>
-                                  </p:stCondLst>
-                                  <p:childTnLst>
-                                    <p:set>
-                                      <p:cBhvr>
-                                        <p:cTn id="38" dur="1" fill="hold">
-                                          <p:stCondLst>
-                                            <p:cond delay="0"/>
-                                          </p:stCondLst>
-                                        </p:cTn>
-                                        <p:tgtEl>
-                                          <p:spTgt spid="16"/>
-                                        </p:tgtEl>
-                                        <p:attrNameLst>
-                                          <p:attrName>style.visibility</p:attrName>
-                                        </p:attrNameLst>
-                                      </p:cBhvr>
-                                      <p:to>
-                                        <p:strVal val="visible"/>
-                                      </p:to>
-                                    </p:set>
-                                  </p:childTnLst>
-                                </p:cTn>
-                              </p:par>
-                              <p:par>
-                                <p:cTn id="39" presetID="1" presetClass="entr" presetSubtype="0" fill="hold" grpId="0" nodeType="withEffect">
-                                  <p:stCondLst>
-                                    <p:cond delay="0"/>
-                                  </p:stCondLst>
-                                  <p:childTnLst>
-                                    <p:set>
-                                      <p:cBhvr>
-                                        <p:cTn id="40" dur="1" fill="hold">
-                                          <p:stCondLst>
-                                            <p:cond delay="0"/>
-                                          </p:stCondLst>
-                                        </p:cTn>
-                                        <p:tgtEl>
-                                          <p:spTgt spid="4"/>
-                                        </p:tgtEl>
-                                        <p:attrNameLst>
-                                          <p:attrName>style.visibility</p:attrName>
-                                        </p:attrNameLst>
-                                      </p:cBhvr>
-                                      <p:to>
-                                        <p:strVal val="visible"/>
-                                      </p:to>
-                                    </p:set>
-                                  </p:childTnLst>
-                                </p:cTn>
-                              </p:par>
-                            </p:childTnLst>
-                          </p:cTn>
-                        </p:par>
-                      </p:childTnLst>
-                    </p:cTn>
-                  </p:par>
-                  <p:par>
-                    <p:cTn id="41" fill="hold">
-                      <p:stCondLst>
-                        <p:cond delay="indefinite"/>
-                      </p:stCondLst>
-                      <p:childTnLst>
-                        <p:par>
-                          <p:cTn id="42" fill="hold">
-                            <p:stCondLst>
-                              <p:cond delay="0"/>
-                            </p:stCondLst>
-                            <p:childTnLst>
-                              <p:par>
-                                <p:cTn id="43" presetID="1" presetClass="entr" presetSubtype="0" fill="hold" nodeType="clickEffect">
-                                  <p:stCondLst>
-                                    <p:cond delay="0"/>
-                                  </p:stCondLst>
-                                  <p:childTnLst>
-                                    <p:set>
-                                      <p:cBhvr>
-                                        <p:cTn id="44" dur="1" fill="hold">
-                                          <p:stCondLst>
-                                            <p:cond delay="0"/>
-                                          </p:stCondLst>
-                                        </p:cTn>
-                                        <p:tgtEl>
-                                          <p:spTgt spid="22"/>
-                                        </p:tgtEl>
-                                        <p:attrNameLst>
-                                          <p:attrName>style.visibility</p:attrName>
-                                        </p:attrNameLst>
-                                      </p:cBhvr>
-                                      <p:to>
-                                        <p:strVal val="visible"/>
-                                      </p:to>
-                                    </p:set>
-                                  </p:childTnLst>
-                                </p:cTn>
-                              </p:par>
-                              <p:par>
-                                <p:cTn id="45" presetID="1" presetClass="entr" presetSubtype="0" fill="hold" grpId="0" nodeType="withEffect">
-                                  <p:stCondLst>
-                                    <p:cond delay="0"/>
-                                  </p:stCondLst>
-                                  <p:childTnLst>
-                                    <p:set>
-                                      <p:cBhvr>
-                                        <p:cTn id="46" dur="1" fill="hold">
-                                          <p:stCondLst>
-                                            <p:cond delay="0"/>
-                                          </p:stCondLst>
-                                        </p:cTn>
-                                        <p:tgtEl>
-                                          <p:spTgt spid="21"/>
-                                        </p:tgtEl>
-                                        <p:attrNameLst>
-                                          <p:attrName>style.visibility</p:attrName>
-                                        </p:attrNameLst>
-                                      </p:cBhvr>
-                                      <p:to>
-                                        <p:strVal val="visible"/>
-                                      </p:to>
-                                    </p:set>
-                                  </p:childTnLst>
-                                </p:cTn>
-                              </p:par>
-                            </p:childTnLst>
-                          </p:cTn>
-                        </p:par>
-                      </p:childTnLst>
-                    </p:cTn>
-                  </p:par>
-                  <p:par>
-                    <p:cTn id="47" fill="hold">
-                      <p:stCondLst>
-                        <p:cond delay="indefinite"/>
-                      </p:stCondLst>
-                      <p:childTnLst>
-                        <p:par>
-                          <p:cTn id="48" fill="hold">
-                            <p:stCondLst>
-                              <p:cond delay="0"/>
-                            </p:stCondLst>
-                            <p:childTnLst>
-                              <p:par>
-                                <p:cTn id="49" presetID="1" presetClass="entr" presetSubtype="0" fill="hold" nodeType="clickEffect">
-                                  <p:stCondLst>
-                                    <p:cond delay="0"/>
-                                  </p:stCondLst>
-                                  <p:childTnLst>
-                                    <p:set>
-                                      <p:cBhvr>
-                                        <p:cTn id="50" dur="1" fill="hold">
-                                          <p:stCondLst>
-                                            <p:cond delay="0"/>
-                                          </p:stCondLst>
-                                        </p:cTn>
-                                        <p:tgtEl>
-                                          <p:spTgt spid="9"/>
-                                        </p:tgtEl>
-                                        <p:attrNameLst>
-                                          <p:attrName>style.visibility</p:attrName>
-                                        </p:attrNameLst>
-                                      </p:cBhvr>
-                                      <p:to>
-                                        <p:strVal val="visible"/>
-                                      </p:to>
-                                    </p:set>
-                                  </p:childTnLst>
-                                </p:cTn>
-                              </p:par>
-                            </p:childTnLst>
-                          </p:cTn>
-                        </p:par>
-                      </p:childTnLst>
-                    </p:cTn>
-                  </p:par>
-                  <p:par>
-                    <p:cTn id="51" fill="hold">
-                      <p:stCondLst>
-                        <p:cond delay="indefinite"/>
-                      </p:stCondLst>
-                      <p:childTnLst>
-                        <p:par>
-                          <p:cTn id="52" fill="hold">
-                            <p:stCondLst>
-                              <p:cond delay="0"/>
-                            </p:stCondLst>
-                            <p:childTnLst>
-                              <p:par>
-                                <p:cTn id="53" presetID="1" presetClass="entr" presetSubtype="0" fill="hold" grpId="0" nodeType="clickEffect">
-                                  <p:stCondLst>
-                                    <p:cond delay="0"/>
-                                  </p:stCondLst>
-                                  <p:childTnLst>
-                                    <p:set>
-                                      <p:cBhvr>
-                                        <p:cTn id="54" dur="1" fill="hold">
-                                          <p:stCondLst>
-                                            <p:cond delay="0"/>
-                                          </p:stCondLst>
-                                        </p:cTn>
-                                        <p:tgtEl>
-                                          <p:spTgt spid="2"/>
-                                        </p:tgtEl>
-                                        <p:attrNameLst>
-                                          <p:attrName>style.visibility</p:attrName>
-                                        </p:attrNameLst>
-                                      </p:cBhvr>
-                                      <p:to>
-                                        <p:strVal val="visible"/>
-                                      </p:to>
-                                    </p:set>
-                                  </p:childTnLst>
-                                </p:cTn>
-                              </p:par>
-                              <p:par>
-                                <p:cTn id="55" presetID="1" presetClass="entr" presetSubtype="0" fill="hold" grpId="0" nodeType="withEffect">
-                                  <p:stCondLst>
-                                    <p:cond delay="0"/>
-                                  </p:stCondLst>
-                                  <p:childTnLst>
-                                    <p:set>
-                                      <p:cBhvr>
-                                        <p:cTn id="56" dur="1" fill="hold">
-                                          <p:stCondLst>
-                                            <p:cond delay="0"/>
-                                          </p:stCondLst>
-                                        </p:cTn>
-                                        <p:tgtEl>
-                                          <p:spTgt spid="14"/>
-                                        </p:tgtEl>
-                                        <p:attrNameLst>
-                                          <p:attrName>style.visibility</p:attrName>
-                                        </p:attrNameLst>
-                                      </p:cBhvr>
-                                      <p:to>
-                                        <p:strVal val="visible"/>
-                                      </p:to>
-                                    </p:set>
-                                  </p:childTnLst>
-                                </p:cTn>
-                              </p:par>
-                              <p:par>
-                                <p:cTn id="57" presetID="1" presetClass="entr" presetSubtype="0" fill="hold" nodeType="withEffect">
-                                  <p:stCondLst>
-                                    <p:cond delay="0"/>
-                                  </p:stCondLst>
-                                  <p:childTnLst>
-                                    <p:set>
-                                      <p:cBhvr>
-                                        <p:cTn id="58" dur="1" fill="hold">
-                                          <p:stCondLst>
-                                            <p:cond delay="0"/>
-                                          </p:stCondLst>
-                                        </p:cTn>
-                                        <p:tgtEl>
-                                          <p:spTgt spid="13"/>
-                                        </p:tgtEl>
-                                        <p:attrNameLst>
-                                          <p:attrName>style.visibility</p:attrName>
-                                        </p:attrNameLst>
-                                      </p:cBhvr>
-                                      <p:to>
-                                        <p:strVal val="visible"/>
-                                      </p:to>
-                                    </p:set>
-                                  </p:childTnLst>
-                                </p:cTn>
-                              </p:par>
-                            </p:childTnLst>
-                          </p:cTn>
-                        </p:par>
-                      </p:childTnLst>
-                    </p:cTn>
-                  </p:par>
-                  <p:par>
-                    <p:cTn id="59" fill="hold">
-                      <p:stCondLst>
-                        <p:cond delay="indefinite"/>
-                      </p:stCondLst>
-                      <p:childTnLst>
-                        <p:par>
-                          <p:cTn id="60" fill="hold">
-                            <p:stCondLst>
-                              <p:cond delay="0"/>
-                            </p:stCondLst>
-                            <p:childTnLst>
-                              <p:par>
-                                <p:cTn id="61" presetID="1" presetClass="entr" presetSubtype="0" fill="hold" grpId="0" nodeType="clickEffect">
-                                  <p:stCondLst>
-                                    <p:cond delay="0"/>
-                                  </p:stCondLst>
-                                  <p:childTnLst>
-                                    <p:set>
-                                      <p:cBhvr>
-                                        <p:cTn id="62" dur="1" fill="hold">
-                                          <p:stCondLst>
-                                            <p:cond delay="0"/>
-                                          </p:stCondLst>
-                                        </p:cTn>
-                                        <p:tgtEl>
-                                          <p:spTgt spid="10"/>
-                                        </p:tgtEl>
-                                        <p:attrNameLst>
-                                          <p:attrName>style.visibility</p:attrName>
-                                        </p:attrNameLst>
-                                      </p:cBhvr>
-                                      <p:to>
-                                        <p:strVal val="visible"/>
-                                      </p:to>
-                                    </p:set>
-                                  </p:childTnLst>
-                                </p:cTn>
-                              </p:par>
-                              <p:par>
-                                <p:cTn id="63" presetID="1" presetClass="entr" presetSubtype="0" fill="hold" nodeType="withEffect">
-                                  <p:stCondLst>
-                                    <p:cond delay="0"/>
-                                  </p:stCondLst>
-                                  <p:childTnLst>
-                                    <p:set>
-                                      <p:cBhvr>
-                                        <p:cTn id="64" dur="1" fill="hold">
-                                          <p:stCondLst>
-                                            <p:cond delay="0"/>
-                                          </p:stCondLst>
-                                        </p:cTn>
-                                        <p:tgtEl>
-                                          <p:spTgt spid="6"/>
-                                        </p:tgtEl>
-                                        <p:attrNameLst>
-                                          <p:attrName>style.visibility</p:attrName>
-                                        </p:attrNameLst>
-                                      </p:cBhvr>
-                                      <p:to>
-                                        <p:strVal val="visible"/>
-                                      </p:to>
-                                    </p:set>
-                                  </p:childTnLst>
-                                </p:cTn>
-                              </p:par>
-                            </p:childTnLst>
-                          </p:cTn>
-                        </p:par>
-                      </p:childTnLst>
-                    </p:cTn>
-                  </p:par>
-                  <p:par>
-                    <p:cTn id="65" fill="hold">
-                      <p:stCondLst>
-                        <p:cond delay="indefinite"/>
-                      </p:stCondLst>
-                      <p:childTnLst>
-                        <p:par>
-                          <p:cTn id="66" fill="hold">
-                            <p:stCondLst>
-                              <p:cond delay="0"/>
-                            </p:stCondLst>
-                            <p:childTnLst>
-                              <p:par>
-                                <p:cTn id="67" presetID="2" presetClass="entr" presetSubtype="4" fill="hold" grpId="0" nodeType="clickEffect">
-                                  <p:stCondLst>
-                                    <p:cond delay="0"/>
-                                  </p:stCondLst>
-                                  <p:childTnLst>
-                                    <p:set>
-                                      <p:cBhvr>
-                                        <p:cTn id="68" dur="1" fill="hold">
-                                          <p:stCondLst>
-                                            <p:cond delay="0"/>
-                                          </p:stCondLst>
-                                        </p:cTn>
-                                        <p:tgtEl>
-                                          <p:spTgt spid="23"/>
-                                        </p:tgtEl>
-                                        <p:attrNameLst>
-                                          <p:attrName>style.visibility</p:attrName>
-                                        </p:attrNameLst>
-                                      </p:cBhvr>
-                                      <p:to>
-                                        <p:strVal val="visible"/>
-                                      </p:to>
-                                    </p:set>
-                                    <p:anim calcmode="lin" valueType="num">
-                                      <p:cBhvr additive="base">
-                                        <p:cTn id="69" dur="500" fill="hold"/>
-                                        <p:tgtEl>
-                                          <p:spTgt spid="23"/>
-                                        </p:tgtEl>
-                                        <p:attrNameLst>
-                                          <p:attrName>ppt_x</p:attrName>
-                                        </p:attrNameLst>
-                                      </p:cBhvr>
-                                      <p:tavLst>
-                                        <p:tav tm="0">
-                                          <p:val>
-                                            <p:strVal val="#ppt_x"/>
-                                          </p:val>
-                                        </p:tav>
-                                        <p:tav tm="100000">
-                                          <p:val>
-                                            <p:strVal val="#ppt_x"/>
-                                          </p:val>
-                                        </p:tav>
-                                      </p:tavLst>
-                                    </p:anim>
-                                    <p:anim calcmode="lin" valueType="num">
-                                      <p:cBhvr additive="base">
-                                        <p:cTn id="70" dur="500" fill="hold"/>
-                                        <p:tgtEl>
-                                          <p:spTgt spid="23"/>
-                                        </p:tgtEl>
-                                        <p:attrNameLst>
-                                          <p:attrName>ppt_y</p:attrName>
-                                        </p:attrNameLst>
-                                      </p:cBhvr>
-                                      <p:tavLst>
-                                        <p:tav tm="0">
-                                          <p:val>
-                                            <p:strVal val="1+#ppt_h/2"/>
-                                          </p:val>
-                                        </p:tav>
-                                        <p:tav tm="100000">
-                                          <p:val>
-                                            <p:strVal val="#ppt_y"/>
-                                          </p:val>
-                                        </p:tav>
-                                      </p:tavLst>
-                                    </p:anim>
-                                  </p:childTnLst>
-                                </p:cTn>
-                              </p:par>
-                              <p:par>
-                                <p:cTn id="71" presetID="2" presetClass="entr" presetSubtype="4" fill="hold" grpId="0" nodeType="withEffect">
-                                  <p:stCondLst>
-                                    <p:cond delay="0"/>
-                                  </p:stCondLst>
-                                  <p:childTnLst>
-                                    <p:set>
-                                      <p:cBhvr>
-                                        <p:cTn id="72" dur="1" fill="hold">
-                                          <p:stCondLst>
-                                            <p:cond delay="0"/>
-                                          </p:stCondLst>
-                                        </p:cTn>
-                                        <p:tgtEl>
-                                          <p:spTgt spid="24"/>
-                                        </p:tgtEl>
-                                        <p:attrNameLst>
-                                          <p:attrName>style.visibility</p:attrName>
-                                        </p:attrNameLst>
-                                      </p:cBhvr>
-                                      <p:to>
-                                        <p:strVal val="visible"/>
-                                      </p:to>
-                                    </p:set>
-                                    <p:anim calcmode="lin" valueType="num">
-                                      <p:cBhvr additive="base">
-                                        <p:cTn id="73" dur="500" fill="hold"/>
-                                        <p:tgtEl>
-                                          <p:spTgt spid="24"/>
-                                        </p:tgtEl>
-                                        <p:attrNameLst>
-                                          <p:attrName>ppt_x</p:attrName>
-                                        </p:attrNameLst>
-                                      </p:cBhvr>
-                                      <p:tavLst>
-                                        <p:tav tm="0">
-                                          <p:val>
-                                            <p:strVal val="#ppt_x"/>
-                                          </p:val>
-                                        </p:tav>
-                                        <p:tav tm="100000">
-                                          <p:val>
-                                            <p:strVal val="#ppt_x"/>
-                                          </p:val>
-                                        </p:tav>
-                                      </p:tavLst>
-                                    </p:anim>
-                                    <p:anim calcmode="lin" valueType="num">
-                                      <p:cBhvr additive="base">
-                                        <p:cTn id="74" dur="500" fill="hold"/>
-                                        <p:tgtEl>
-                                          <p:spTgt spid="24"/>
-                                        </p:tgtEl>
-                                        <p:attrNameLst>
-                                          <p:attrName>ppt_y</p:attrName>
-                                        </p:attrNameLst>
-                                      </p:cBhvr>
-                                      <p:tavLst>
-                                        <p:tav tm="0">
-                                          <p:val>
-                                            <p:strVal val="1+#ppt_h/2"/>
-                                          </p:val>
-                                        </p:tav>
-                                        <p:tav tm="100000">
-                                          <p:val>
-                                            <p:strVal val="#ppt_y"/>
-                                          </p:val>
-                                        </p:tav>
-                                      </p:tavLst>
-                                    </p:anim>
-                                  </p:childTnLst>
-                                </p:cTn>
-                              </p:par>
-                              <p:par>
-                                <p:cTn id="75" presetID="2" presetClass="entr" presetSubtype="4" fill="hold" grpId="0" nodeType="withEffect">
-                                  <p:stCondLst>
-                                    <p:cond delay="0"/>
-                                  </p:stCondLst>
-                                  <p:childTnLst>
-                                    <p:set>
-                                      <p:cBhvr>
-                                        <p:cTn id="76" dur="1" fill="hold">
-                                          <p:stCondLst>
-                                            <p:cond delay="0"/>
-                                          </p:stCondLst>
-                                        </p:cTn>
-                                        <p:tgtEl>
-                                          <p:spTgt spid="25"/>
-                                        </p:tgtEl>
-                                        <p:attrNameLst>
-                                          <p:attrName>style.visibility</p:attrName>
-                                        </p:attrNameLst>
-                                      </p:cBhvr>
-                                      <p:to>
-                                        <p:strVal val="visible"/>
-                                      </p:to>
-                                    </p:set>
-                                    <p:anim calcmode="lin" valueType="num">
-                                      <p:cBhvr additive="base">
-                                        <p:cTn id="77" dur="500" fill="hold"/>
-                                        <p:tgtEl>
-                                          <p:spTgt spid="25"/>
-                                        </p:tgtEl>
-                                        <p:attrNameLst>
-                                          <p:attrName>ppt_x</p:attrName>
-                                        </p:attrNameLst>
-                                      </p:cBhvr>
-                                      <p:tavLst>
-                                        <p:tav tm="0">
-                                          <p:val>
-                                            <p:strVal val="#ppt_x"/>
-                                          </p:val>
-                                        </p:tav>
-                                        <p:tav tm="100000">
-                                          <p:val>
-                                            <p:strVal val="#ppt_x"/>
-                                          </p:val>
-                                        </p:tav>
-                                      </p:tavLst>
-                                    </p:anim>
-                                    <p:anim calcmode="lin" valueType="num">
-                                      <p:cBhvr additive="base">
-                                        <p:cTn id="78" dur="500" fill="hold"/>
-                                        <p:tgtEl>
-                                          <p:spTgt spid="25"/>
-                                        </p:tgtEl>
-                                        <p:attrNameLst>
-                                          <p:attrName>ppt_y</p:attrName>
-                                        </p:attrNameLst>
-                                      </p:cBhvr>
-                                      <p:tavLst>
-                                        <p:tav tm="0">
-                                          <p:val>
-                                            <p:strVal val="1+#ppt_h/2"/>
-                                          </p:val>
-                                        </p:tav>
-                                        <p:tav tm="100000">
-                                          <p:val>
-                                            <p:strVal val="#ppt_y"/>
-                                          </p:val>
-                                        </p:tav>
-                                      </p:tavLst>
-                                    </p:anim>
-                                  </p:childTnLst>
-                                </p:cTn>
-                              </p:par>
-                              <p:par>
-                                <p:cTn id="79" presetID="2" presetClass="entr" presetSubtype="4" fill="hold" grpId="0" nodeType="withEffect">
-                                  <p:stCondLst>
-                                    <p:cond delay="0"/>
-                                  </p:stCondLst>
-                                  <p:childTnLst>
-                                    <p:set>
-                                      <p:cBhvr>
-                                        <p:cTn id="80" dur="1" fill="hold">
-                                          <p:stCondLst>
-                                            <p:cond delay="0"/>
-                                          </p:stCondLst>
-                                        </p:cTn>
-                                        <p:tgtEl>
-                                          <p:spTgt spid="26"/>
-                                        </p:tgtEl>
-                                        <p:attrNameLst>
-                                          <p:attrName>style.visibility</p:attrName>
-                                        </p:attrNameLst>
-                                      </p:cBhvr>
-                                      <p:to>
-                                        <p:strVal val="visible"/>
-                                      </p:to>
-                                    </p:set>
-                                    <p:anim calcmode="lin" valueType="num">
-                                      <p:cBhvr additive="base">
-                                        <p:cTn id="81" dur="500" fill="hold"/>
-                                        <p:tgtEl>
-                                          <p:spTgt spid="26"/>
-                                        </p:tgtEl>
-                                        <p:attrNameLst>
-                                          <p:attrName>ppt_x</p:attrName>
-                                        </p:attrNameLst>
-                                      </p:cBhvr>
-                                      <p:tavLst>
-                                        <p:tav tm="0">
-                                          <p:val>
-                                            <p:strVal val="#ppt_x"/>
-                                          </p:val>
-                                        </p:tav>
-                                        <p:tav tm="100000">
-                                          <p:val>
-                                            <p:strVal val="#ppt_x"/>
-                                          </p:val>
-                                        </p:tav>
-                                      </p:tavLst>
-                                    </p:anim>
-                                    <p:anim calcmode="lin" valueType="num">
-                                      <p:cBhvr additive="base">
-                                        <p:cTn id="82" dur="500" fill="hold"/>
-                                        <p:tgtEl>
-                                          <p:spTgt spid="26"/>
-                                        </p:tgtEl>
-                                        <p:attrNameLst>
-                                          <p:attrName>ppt_y</p:attrName>
-                                        </p:attrNameLst>
-                                      </p:cBhvr>
-                                      <p:tavLst>
-                                        <p:tav tm="0">
-                                          <p:val>
-                                            <p:strVal val="1+#ppt_h/2"/>
-                                          </p:val>
-                                        </p:tav>
-                                        <p:tav tm="100000">
-                                          <p:val>
-                                            <p:strVal val="#ppt_y"/>
-                                          </p:val>
-                                        </p:tav>
-                                      </p:tavLst>
-                                    </p:anim>
-                                  </p:childTnLst>
-                                </p:cTn>
-                              </p:par>
-                            </p:childTnLst>
-                          </p:cTn>
-                        </p:par>
-                      </p:childTnLst>
-                    </p:cTn>
-                  </p:par>
-                </p:childTnLst>
-              </p:cTn>
-              <p:prevCondLst>
-                <p:cond evt="onPrev" delay="0">
-                  <p:tgtEl>
-                    <p:sldTgt/>
-                  </p:tgtEl>
-                </p:cond>
-              </p:prevCondLst>
-              <p:nextCondLst>
-                <p:cond evt="onNext" delay="0">
-                  <p:tgtEl>
-                    <p:sldTgt/>
-                  </p:tgtEl>
-                </p:cond>
-              </p:nextCondLst>
-            </p:seq>
-          </p:childTnLst>
-        </p:cTn>
-      </p:par>
-    </p:tnLst>
-    <p:bldLst>
-      <p:bldP spid="2" grpId="0" animBg="1"/>
-      <p:bldP spid="3" grpId="0" animBg="1"/>
-      <p:bldP spid="4" grpId="0" animBg="1"/>
-      <p:bldP spid="5" grpId="0" animBg="1"/>
-      <p:bldP spid="10" grpId="0"/>
-      <p:bldP spid="12" grpId="0"/>
-      <p:bldP spid="14" grpId="0"/>
-      <p:bldP spid="15" grpId="0"/>
-      <p:bldP spid="16" grpId="0"/>
-      <p:bldP spid="18" grpId="0"/>
-      <p:bldP spid="19" grpId="0" animBg="1"/>
-      <p:bldP spid="21" grpId="0" animBg="1"/>
-      <p:bldP spid="23" grpId="0" animBg="1"/>
-      <p:bldP spid="24" grpId="0" animBg="1"/>
-      <p:bldP spid="25" grpId="0"/>
-      <p:bldP spid="26" grpId="0"/>
-    </p:bldLst>
-  </p:timing>
 </p:sld>
 </file>
 
@@ -17252,319 +15703,4 @@
     </a:ext>
   </a:extLst>
 </a:theme>
-</file>
-
-<file path=ppt/theme/theme2.xml><?xml version="1.0" encoding="utf-8"?>
-<a:theme xmlns:a="http://schemas.openxmlformats.org/drawingml/2006/main" name="Office Theme">
-  <a:themeElements>
-    <a:clrScheme name="Office">
-      <a:dk1>
-        <a:sysClr val="windowText" lastClr="000000"/>
-      </a:dk1>
-      <a:lt1>
-        <a:sysClr val="window" lastClr="FFFFFF"/>
-      </a:lt1>
-      <a:dk2>
-        <a:srgbClr val="0E2841"/>
-      </a:dk2>
-      <a:lt2>
-        <a:srgbClr val="E8E8E8"/>
-      </a:lt2>
-      <a:accent1>
-        <a:srgbClr val="156082"/>
-      </a:accent1>
-      <a:accent2>
-        <a:srgbClr val="E97132"/>
-      </a:accent2>
-      <a:accent3>
-        <a:srgbClr val="196B24"/>
-      </a:accent3>
-      <a:accent4>
-        <a:srgbClr val="0F9ED5"/>
-      </a:accent4>
-      <a:accent5>
-        <a:srgbClr val="A02B93"/>
-      </a:accent5>
-      <a:accent6>
-        <a:srgbClr val="4EA72E"/>
-      </a:accent6>
-      <a:hlink>
-        <a:srgbClr val="467886"/>
-      </a:hlink>
-      <a:folHlink>
-        <a:srgbClr val="96607D"/>
-      </a:folHlink>
-    </a:clrScheme>
-    <a:fontScheme name="Office">
-      <a:majorFont>
-        <a:latin typeface="Aptos Display" panose="02110004020202020204"/>
-        <a:ea typeface=""/>
-        <a:cs typeface=""/>
-        <a:font script="Jpan" typeface="游ゴシック Light"/>
-        <a:font script="Hang" typeface="맑은 고딕"/>
-        <a:font script="Hans" typeface="等线 Light"/>
-        <a:font script="Hant" typeface="新細明體"/>
-        <a:font script="Arab" typeface="Times New Roman"/>
-        <a:font script="Hebr" typeface="Times New Roman"/>
-        <a:font script="Thai" typeface="Angsana New"/>
-        <a:font script="Ethi" typeface="Nyala"/>
-        <a:font script="Beng" typeface="Vrinda"/>
-        <a:font script="Gujr" typeface="Shruti"/>
-        <a:font script="Khmr" typeface="MoolBoran"/>
-        <a:font script="Knda" typeface="Tunga"/>
-        <a:font script="Guru" typeface="Raavi"/>
-        <a:font script="Cans" typeface="Euphemia"/>
-        <a:font script="Cher" typeface="Plantagenet Cherokee"/>
-        <a:font script="Yiii" typeface="Microsoft Yi Baiti"/>
-        <a:font script="Tibt" typeface="Microsoft Himalaya"/>
-        <a:font script="Thaa" typeface="MV Boli"/>
-        <a:font script="Deva" typeface="Mangal"/>
-        <a:font script="Telu" typeface="Gautami"/>
-        <a:font script="Taml" typeface="Latha"/>
-        <a:font script="Syrc" typeface="Estrangelo Edessa"/>
-        <a:font script="Orya" typeface="Kalinga"/>
-        <a:font script="Mlym" typeface="Kartika"/>
-        <a:font script="Laoo" typeface="DokChampa"/>
-        <a:font script="Sinh" typeface="Iskoola Pota"/>
-        <a:font script="Mong" typeface="Mongolian Baiti"/>
-        <a:font script="Viet" typeface="Times New Roman"/>
-        <a:font script="Uigh" typeface="Microsoft Uighur"/>
-        <a:font script="Geor" typeface="Sylfaen"/>
-        <a:font script="Armn" typeface="Arial"/>
-        <a:font script="Bugi" typeface="Leelawadee UI"/>
-        <a:font script="Bopo" typeface="Microsoft JhengHei"/>
-        <a:font script="Java" typeface="Javanese Text"/>
-        <a:font script="Lisu" typeface="Segoe UI"/>
-        <a:font script="Mymr" typeface="Myanmar Text"/>
-        <a:font script="Nkoo" typeface="Ebrima"/>
-        <a:font script="Olck" typeface="Nirmala UI"/>
-        <a:font script="Osma" typeface="Ebrima"/>
-        <a:font script="Phag" typeface="Phagspa"/>
-        <a:font script="Syrn" typeface="Estrangelo Edessa"/>
-        <a:font script="Syrj" typeface="Estrangelo Edessa"/>
-        <a:font script="Syre" typeface="Estrangelo Edessa"/>
-        <a:font script="Sora" typeface="Nirmala UI"/>
-        <a:font script="Tale" typeface="Microsoft Tai Le"/>
-        <a:font script="Talu" typeface="Microsoft New Tai Lue"/>
-        <a:font script="Tfng" typeface="Ebrima"/>
-      </a:majorFont>
-      <a:minorFont>
-        <a:latin typeface="Aptos" panose="02110004020202020204"/>
-        <a:ea typeface=""/>
-        <a:cs typeface=""/>
-        <a:font script="Jpan" typeface="游ゴシック"/>
-        <a:font script="Hang" typeface="맑은 고딕"/>
-        <a:font script="Hans" typeface="等线"/>
-        <a:font script="Hant" typeface="新細明體"/>
-        <a:font script="Arab" typeface="Arial"/>
-        <a:font script="Hebr" typeface="Arial"/>
-        <a:font script="Thai" typeface="Cordia New"/>
-        <a:font script="Ethi" typeface="Nyala"/>
-        <a:font script="Beng" typeface="Vrinda"/>
-        <a:font script="Gujr" typeface="Shruti"/>
-        <a:font script="Khmr" typeface="DaunPenh"/>
-        <a:font script="Knda" typeface="Tunga"/>
-        <a:font script="Guru" typeface="Raavi"/>
-        <a:font script="Cans" typeface="Euphemia"/>
-        <a:font script="Cher" typeface="Plantagenet Cherokee"/>
-        <a:font script="Yiii" typeface="Microsoft Yi Baiti"/>
-        <a:font script="Tibt" typeface="Microsoft Himalaya"/>
-        <a:font script="Thaa" typeface="MV Boli"/>
-        <a:font script="Deva" typeface="Mangal"/>
-        <a:font script="Telu" typeface="Gautami"/>
-        <a:font script="Taml" typeface="Latha"/>
-        <a:font script="Syrc" typeface="Estrangelo Edessa"/>
-        <a:font script="Orya" typeface="Kalinga"/>
-        <a:font script="Mlym" typeface="Kartika"/>
-        <a:font script="Laoo" typeface="DokChampa"/>
-        <a:font script="Sinh" typeface="Iskoola Pota"/>
-        <a:font script="Mong" typeface="Mongolian Baiti"/>
-        <a:font script="Viet" typeface="Arial"/>
-        <a:font script="Uigh" typeface="Microsoft Uighur"/>
-        <a:font script="Geor" typeface="Sylfaen"/>
-        <a:font script="Armn" typeface="Arial"/>
-        <a:font script="Bugi" typeface="Leelawadee UI"/>
-        <a:font script="Bopo" typeface="Microsoft JhengHei"/>
-        <a:font script="Java" typeface="Javanese Text"/>
-        <a:font script="Lisu" typeface="Segoe UI"/>
-        <a:font script="Mymr" typeface="Myanmar Text"/>
-        <a:font script="Nkoo" typeface="Ebrima"/>
-        <a:font script="Olck" typeface="Nirmala UI"/>
-        <a:font script="Osma" typeface="Ebrima"/>
-        <a:font script="Phag" typeface="Phagspa"/>
-        <a:font script="Syrn" typeface="Estrangelo Edessa"/>
-        <a:font script="Syrj" typeface="Estrangelo Edessa"/>
-        <a:font script="Syre" typeface="Estrangelo Edessa"/>
-        <a:font script="Sora" typeface="Nirmala UI"/>
-        <a:font script="Tale" typeface="Microsoft Tai Le"/>
-        <a:font script="Talu" typeface="Microsoft New Tai Lue"/>
-        <a:font script="Tfng" typeface="Ebrima"/>
-      </a:minorFont>
-    </a:fontScheme>
-    <a:fmtScheme name="Office">
-      <a:fillStyleLst>
-        <a:solidFill>
-          <a:schemeClr val="phClr"/>
-        </a:solidFill>
-        <a:gradFill rotWithShape="1">
-          <a:gsLst>
-            <a:gs pos="0">
-              <a:schemeClr val="phClr">
-                <a:lumMod val="110000"/>
-                <a:satMod val="105000"/>
-                <a:tint val="67000"/>
-              </a:schemeClr>
-            </a:gs>
-            <a:gs pos="50000">
-              <a:schemeClr val="phClr">
-                <a:lumMod val="105000"/>
-                <a:satMod val="103000"/>
-                <a:tint val="73000"/>
-              </a:schemeClr>
-            </a:gs>
-            <a:gs pos="100000">
-              <a:schemeClr val="phClr">
-                <a:lumMod val="105000"/>
-                <a:satMod val="109000"/>
-                <a:tint val="81000"/>
-              </a:schemeClr>
-            </a:gs>
-          </a:gsLst>
-          <a:lin ang="5400000" scaled="0"/>
-        </a:gradFill>
-        <a:gradFill rotWithShape="1">
-          <a:gsLst>
-            <a:gs pos="0">
-              <a:schemeClr val="phClr">
-                <a:satMod val="103000"/>
-                <a:lumMod val="102000"/>
-                <a:tint val="94000"/>
-              </a:schemeClr>
-            </a:gs>
-            <a:gs pos="50000">
-              <a:schemeClr val="phClr">
-                <a:satMod val="110000"/>
-                <a:lumMod val="100000"/>
-                <a:shade val="100000"/>
-              </a:schemeClr>
-            </a:gs>
-            <a:gs pos="100000">
-              <a:schemeClr val="phClr">
-                <a:lumMod val="99000"/>
-                <a:satMod val="120000"/>
-                <a:shade val="78000"/>
-              </a:schemeClr>
-            </a:gs>
-          </a:gsLst>
-          <a:lin ang="5400000" scaled="0"/>
-        </a:gradFill>
-      </a:fillStyleLst>
-      <a:lnStyleLst>
-        <a:ln w="12700" cap="flat" cmpd="sng" algn="ctr">
-          <a:solidFill>
-            <a:schemeClr val="phClr"/>
-          </a:solidFill>
-          <a:prstDash val="solid"/>
-          <a:miter lim="800000"/>
-        </a:ln>
-        <a:ln w="19050" cap="flat" cmpd="sng" algn="ctr">
-          <a:solidFill>
-            <a:schemeClr val="phClr"/>
-          </a:solidFill>
-          <a:prstDash val="solid"/>
-          <a:miter lim="800000"/>
-        </a:ln>
-        <a:ln w="25400" cap="flat" cmpd="sng" algn="ctr">
-          <a:solidFill>
-            <a:schemeClr val="phClr"/>
-          </a:solidFill>
-          <a:prstDash val="solid"/>
-          <a:miter lim="800000"/>
-        </a:ln>
-      </a:lnStyleLst>
-      <a:effectStyleLst>
-        <a:effectStyle>
-          <a:effectLst/>
-        </a:effectStyle>
-        <a:effectStyle>
-          <a:effectLst/>
-        </a:effectStyle>
-        <a:effectStyle>
-          <a:effectLst>
-            <a:outerShdw blurRad="57150" dist="19050" dir="5400000" algn="ctr" rotWithShape="0">
-              <a:srgbClr val="000000">
-                <a:alpha val="63000"/>
-              </a:srgbClr>
-            </a:outerShdw>
-          </a:effectLst>
-        </a:effectStyle>
-      </a:effectStyleLst>
-      <a:bgFillStyleLst>
-        <a:solidFill>
-          <a:schemeClr val="phClr"/>
-        </a:solidFill>
-        <a:solidFill>
-          <a:schemeClr val="phClr">
-            <a:tint val="95000"/>
-            <a:satMod val="170000"/>
-          </a:schemeClr>
-        </a:solidFill>
-        <a:gradFill rotWithShape="1">
-          <a:gsLst>
-            <a:gs pos="0">
-              <a:schemeClr val="phClr">
-                <a:tint val="93000"/>
-                <a:satMod val="150000"/>
-                <a:shade val="98000"/>
-                <a:lumMod val="102000"/>
-              </a:schemeClr>
-            </a:gs>
-            <a:gs pos="50000">
-              <a:schemeClr val="phClr">
-                <a:tint val="98000"/>
-                <a:satMod val="130000"/>
-                <a:shade val="90000"/>
-                <a:lumMod val="103000"/>
-              </a:schemeClr>
-            </a:gs>
-            <a:gs pos="100000">
-              <a:schemeClr val="phClr">
-                <a:shade val="63000"/>
-                <a:satMod val="120000"/>
-              </a:schemeClr>
-            </a:gs>
-          </a:gsLst>
-          <a:lin ang="5400000" scaled="0"/>
-        </a:gradFill>
-      </a:bgFillStyleLst>
-    </a:fmtScheme>
-  </a:themeElements>
-  <a:objectDefaults>
-    <a:lnDef>
-      <a:spPr/>
-      <a:bodyPr/>
-      <a:lstStyle/>
-      <a:style>
-        <a:lnRef idx="2">
-          <a:schemeClr val="accent1"/>
-        </a:lnRef>
-        <a:fillRef idx="0">
-          <a:schemeClr val="accent1"/>
-        </a:fillRef>
-        <a:effectRef idx="1">
-          <a:schemeClr val="accent1"/>
-        </a:effectRef>
-        <a:fontRef idx="minor">
-          <a:schemeClr val="tx1"/>
-        </a:fontRef>
-      </a:style>
-    </a:lnDef>
-  </a:objectDefaults>
-  <a:extraClrSchemeLst/>
-  <a:extLst>
-    <a:ext uri="{05A4C25C-085E-4340-85A3-A5531E510DB2}">
-      <thm15:themeFamily xmlns:thm15="http://schemas.microsoft.com/office/thememl/2012/main" name="Office Theme" id="{2E142A2C-CD16-42D6-873A-C26D2A0506FA}" vid="{1BDDFF52-6CD6-40A5-AB3C-68EB2F1E4D0A}"/>
-    </a:ext>
-  </a:extLst>
-</a:theme>
 </file>